--- a/2_Sensorik/2.2_Temperatursensoren/2.2_Temperatursensoren.pptx
+++ b/2_Sensorik/2.2_Temperatursensoren/2.2_Temperatursensoren.pptx
@@ -294,7 +294,7 @@
           <a:p>
             <a:fld id="{028B6593-098D-4382-9647-35487FA190B4}" type="datetimeFigureOut">
               <a:rPr lang="de-DE" smtClean="0"/>
-              <a:t>10.03.2026</a:t>
+              <a:t>13.04.2026</a:t>
             </a:fld>
             <a:endParaRPr lang="de-DE"/>
           </a:p>
@@ -16572,7 +16572,7 @@
         <p:spPr>
           <a:xfrm>
             <a:off x="717551" y="632188"/>
-            <a:ext cx="5911850" cy="5355312"/>
+            <a:ext cx="5911850" cy="5078313"/>
           </a:xfrm>
           <a:prstGeom prst="rect">
             <a:avLst/>
@@ -16587,7 +16587,7 @@
           <a:p>
             <a:r>
               <a:rPr lang="de-DE" u="sng" smtClean="0"/>
-              <a:t>Vorgehen zum Test eines DHT22:</a:t>
+              <a:t>Vorgehen zum Test eines NTC:</a:t>
             </a:r>
           </a:p>
           <a:p>
@@ -16608,7 +16608,7 @@
             </a:r>
             <a:r>
               <a:rPr lang="de-DE" smtClean="0"/>
-              <a:t>Verschaltung des DHT22 vornehmen</a:t>
+              <a:t>Verschaltung des NTC vornehmen</a:t>
             </a:r>
             <a:endParaRPr lang="de-DE" dirty="0"/>
           </a:p>
@@ -16627,7 +16627,7 @@
             </a:r>
             <a:r>
               <a:rPr lang="de-DE" smtClean="0"/>
-              <a:t>Programmcode des DHT22 auf ESP flashen (ARDUINO)</a:t>
+              <a:t>Programmcode des NTC auf ESP flashen (ARDUINO)</a:t>
             </a:r>
             <a:endParaRPr lang="de-DE" dirty="0"/>
           </a:p>
@@ -16646,7 +16646,7 @@
             </a:r>
             <a:r>
               <a:rPr lang="de-DE" smtClean="0"/>
-              <a:t>DHT22 mit Hand für etwa 10 Sekunden umschließen</a:t>
+              <a:t>NTC mit Hand für etwa 10 Sekunden umschließen</a:t>
             </a:r>
             <a:endParaRPr lang="de-DE" dirty="0"/>
           </a:p>
@@ -16665,7 +16665,7 @@
             </a:r>
             <a:r>
               <a:rPr lang="de-DE" smtClean="0"/>
-              <a:t>DHT22 loslassen für etwa 10 Sekunden</a:t>
+              <a:t>NTC loslassen für etwa 10 Sekunden</a:t>
             </a:r>
             <a:endParaRPr lang="de-DE" dirty="0"/>
           </a:p>
@@ -16707,32 +16707,30 @@
           </a:p>
           <a:p>
             <a:r>
-              <a:rPr lang="de-DE"/>
-              <a:t>Steigt und sinkt die </a:t>
-            </a:r>
-            <a:r>
               <a:rPr lang="de-DE" smtClean="0"/>
-              <a:t>relative Luftfeuchte </a:t>
-            </a:r>
-            <a:r>
-              <a:rPr lang="de-DE"/>
-              <a:t>wie vorgesehen</a:t>
+              <a:t>Sind </a:t>
             </a:r>
             <a:r>
               <a:rPr lang="de-DE" smtClean="0"/>
-              <a:t>?</a:t>
-            </a:r>
-          </a:p>
-          <a:p>
+              <a:t>die </a:t>
+            </a:r>
             <a:r>
               <a:rPr lang="de-DE" smtClean="0"/>
-              <a:t>Sind die Temperatur- und Luftfeuchteänderungen bei Wiederholung des Schrittes 3 und 4 stabil?</a:t>
-            </a:r>
-          </a:p>
-          <a:p>
+              <a:t>Temperaturänderungen bei </a:t>
+            </a:r>
             <a:r>
               <a:rPr lang="de-DE" smtClean="0"/>
-              <a:t>Was ist die Differenz zwischen der maximal und der minimal gemessenen Temperatur und Luftfeuchte?</a:t>
+              <a:t>Wiederholung des Schrittes 3 und 4 stabil?</a:t>
+            </a:r>
+          </a:p>
+          <a:p>
+            <a:r>
+              <a:rPr lang="de-DE" smtClean="0"/>
+              <a:t>Was ist die Differenz zwischen der maximal und der minimal gemessenen </a:t>
+            </a:r>
+            <a:r>
+              <a:rPr lang="de-DE" smtClean="0"/>
+              <a:t>Temperatur?</a:t>
             </a:r>
             <a:endParaRPr lang="de-DE"/>
           </a:p>
@@ -22406,15 +22404,15 @@
 <file path=customXml/itemProps2.xml><?xml version="1.0" encoding="utf-8"?>
 <ds:datastoreItem xmlns:ds="http://schemas.openxmlformats.org/officeDocument/2006/customXml" ds:itemID="{4D9AF071-B304-4F0F-8459-AC4D742E5C60}">
   <ds:schemaRefs>
-    <ds:schemaRef ds:uri="http://schemas.microsoft.com/office/2006/metadata/properties"/>
+    <ds:schemaRef ds:uri="http://purl.org/dc/elements/1.1/"/>
+    <ds:schemaRef ds:uri="http://schemas.microsoft.com/office/infopath/2007/PartnerControls"/>
     <ds:schemaRef ds:uri="http://purl.org/dc/dcmitype/"/>
     <ds:schemaRef ds:uri="http://schemas.microsoft.com/office/2006/documentManagement/types"/>
+    <ds:schemaRef ds:uri="http://purl.org/dc/terms/"/>
     <ds:schemaRef ds:uri="http://schemas.openxmlformats.org/package/2006/metadata/core-properties"/>
     <ds:schemaRef ds:uri="99f41258-1f02-46b6-b230-447d6494c4cb"/>
+    <ds:schemaRef ds:uri="http://schemas.microsoft.com/office/2006/metadata/properties"/>
     <ds:schemaRef ds:uri="http://www.w3.org/XML/1998/namespace"/>
-    <ds:schemaRef ds:uri="http://purl.org/dc/elements/1.1/"/>
-    <ds:schemaRef ds:uri="http://schemas.microsoft.com/office/infopath/2007/PartnerControls"/>
-    <ds:schemaRef ds:uri="http://purl.org/dc/terms/"/>
   </ds:schemaRefs>
 </ds:datastoreItem>
 </file>
